--- a/huawei-ict/submission/知径EduPath-华为ICT2026-作品介绍.pptx
+++ b/huawei-ict/submission/知径EduPath-华为ICT2026-作品介绍.pptx
@@ -8085,7 +8085,7 @@
                 <a:latin typeface="微软雅黑"/>
                 <a:ea typeface="微软雅黑"/>
               </a:rPr>
-              <a:t>· 16 项自检 + 13 项单测</a:t>
+              <a:t>· 16 项自检 + 14 项单测</a:t>
             </a:r>
           </a:p>
         </p:txBody>
